--- a/curso_es/pptx/S21.pptx
+++ b/curso_es/pptx/S21.pptx
@@ -3800,7 +3800,7 @@
                 </a:solidFill>
                 <a:latin typeface="Nunito Sans"/>
               </a:rPr>
-              <a:t>Kevin: «Si hoy no hago los deberes de Lengua, suspenderé, repetiré, dejaré el instituto y nunca encontraré trabajo».</a:t>
+              <a:t>Un chico: «Si hoy no hago los deberes de Lengua, suspenderé, repetiré, dejaré el instituto y nunca encontraré trabajo».</a:t>
             </a:r>
           </a:p>
         </p:txBody>
@@ -4109,7 +4109,7 @@
                 </a:solidFill>
                 <a:latin typeface="Nunito Sans"/>
               </a:rPr>
-              <a:t>Naiara tiene el móvil al 5 %: «Si no lo cargo, se apagará esta tarde y no podré avisar a mi madre al salir de entrenar».</a:t>
+              <a:t>Una chica tiene el móvil al 5 %: «Si no lo cargo, se apagará esta tarde y no podré avisar a mi madre al salir de entrenar».</a:t>
             </a:r>
           </a:p>
         </p:txBody>
@@ -4418,7 +4418,7 @@
                 </a:solidFill>
                 <a:latin typeface="Nunito Sans"/>
               </a:rPr>
-              <a:t>Dylan: «Si empiezas fumando “solo en fiestas”, es fácil que acabes fumando cada día. La nicotina engancha».</a:t>
+              <a:t>Un chico: «Si empiezas fumando “solo en fiestas”, es fácil que acabes fumando cada día. La nicotina engancha».</a:t>
             </a:r>
           </a:p>
         </p:txBody>
